--- a/Day34-LLM-Deployment-and-Lifecycle/Day34_Deck_LLM_Deployment_and_Lifecycle.pptx
+++ b/Day34-LLM-Deployment-and-Lifecycle/Day34_Deck_LLM_Deployment_and_Lifecycle.pptx
@@ -5252,13 +5252,13 @@
           <a:noFill/>
         </p:spPr>
         <p:txBody>
-          <a:bodyPr wrap="square" lIns="0" rIns="0" tIns="0" bIns="0" anchor="t">
-            <a:spAutoFit/>
-          </a:bodyPr>
-          <a:lstStyle/>
-          <a:p>
-            <a:r>
-              <a:rPr sz="1133" b="0" i="0">
+          <a:bodyPr wrap="none" lIns="0" rIns="0" tIns="0" bIns="0" anchor="t">
+            <a:spAutoFit/>
+          </a:bodyPr>
+          <a:lstStyle/>
+          <a:p>
+            <a:r>
+              <a:rPr sz="997" b="0" i="0">
                 <a:solidFill>
                   <a:srgbClr val="EAF7F5"/>
                 </a:solidFill>
@@ -5269,7 +5269,7 @@
           </a:p>
           <a:p>
             <a:r>
-              <a:rPr sz="1133" b="0" i="0">
+              <a:rPr sz="997" b="0" i="0">
                 <a:solidFill>
                   <a:srgbClr val="EAF7F5"/>
                 </a:solidFill>
@@ -5280,7 +5280,7 @@
           </a:p>
           <a:p>
             <a:r>
-              <a:rPr sz="1133" b="0" i="0">
+              <a:rPr sz="997" b="0" i="0">
                 <a:solidFill>
                   <a:srgbClr val="EAF7F5"/>
                 </a:solidFill>
@@ -5291,7 +5291,7 @@
           </a:p>
           <a:p>
             <a:r>
-              <a:rPr sz="1133" b="0" i="0">
+              <a:rPr sz="997" b="0" i="0">
                 <a:solidFill>
                   <a:srgbClr val="EAF7F5"/>
                 </a:solidFill>
@@ -5302,7 +5302,7 @@
           </a:p>
           <a:p>
             <a:r>
-              <a:rPr sz="1133" b="0" i="0">
+              <a:rPr sz="997" b="0" i="0">
                 <a:solidFill>
                   <a:srgbClr val="EAF7F5"/>
                 </a:solidFill>
@@ -5313,7 +5313,7 @@
           </a:p>
           <a:p>
             <a:r>
-              <a:rPr sz="1133" b="0" i="0">
+              <a:rPr sz="997" b="0" i="0">
                 <a:solidFill>
                   <a:srgbClr val="EAF7F5"/>
                 </a:solidFill>
@@ -5324,7 +5324,7 @@
           </a:p>
           <a:p>
             <a:r>
-              <a:rPr sz="1133" b="0" i="0">
+              <a:rPr sz="997" b="0" i="0">
                 <a:solidFill>
                   <a:srgbClr val="EAF7F5"/>
                 </a:solidFill>
@@ -5335,7 +5335,7 @@
           </a:p>
           <a:p>
             <a:r>
-              <a:rPr sz="1133" b="0" i="0">
+              <a:rPr sz="997" b="0" i="0">
                 <a:solidFill>
                   <a:srgbClr val="EAF7F5"/>
                 </a:solidFill>
@@ -5346,7 +5346,7 @@
           </a:p>
           <a:p>
             <a:r>
-              <a:rPr sz="1133" b="0" i="0">
+              <a:rPr sz="997" b="0" i="0">
                 <a:solidFill>
                   <a:srgbClr val="EAF7F5"/>
                 </a:solidFill>
@@ -7467,13 +7467,13 @@
           <a:noFill/>
         </p:spPr>
         <p:txBody>
-          <a:bodyPr wrap="square" lIns="0" rIns="0" tIns="0" bIns="0" anchor="t">
-            <a:spAutoFit/>
-          </a:bodyPr>
-          <a:lstStyle/>
-          <a:p>
-            <a:r>
-              <a:rPr sz="962" b="0" i="0">
+          <a:bodyPr wrap="none" lIns="0" rIns="0" tIns="0" bIns="0" anchor="t">
+            <a:spAutoFit/>
+          </a:bodyPr>
+          <a:lstStyle/>
+          <a:p>
+            <a:r>
+              <a:rPr sz="846" b="0" i="0">
                 <a:solidFill>
                   <a:srgbClr val="EAF7F5"/>
                 </a:solidFill>
@@ -7484,7 +7484,7 @@
           </a:p>
           <a:p>
             <a:r>
-              <a:rPr sz="962" b="0" i="0">
+              <a:rPr sz="846" b="0" i="0">
                 <a:solidFill>
                   <a:srgbClr val="EAF7F5"/>
                 </a:solidFill>
@@ -7495,7 +7495,7 @@
           </a:p>
           <a:p>
             <a:r>
-              <a:rPr sz="962" b="0" i="0">
+              <a:rPr sz="846" b="0" i="0">
                 <a:solidFill>
                   <a:srgbClr val="EAF7F5"/>
                 </a:solidFill>
@@ -7506,7 +7506,7 @@
           </a:p>
           <a:p>
             <a:r>
-              <a:rPr sz="962" b="0" i="0">
+              <a:rPr sz="846" b="0" i="0">
                 <a:solidFill>
                   <a:srgbClr val="EAF7F5"/>
                 </a:solidFill>
@@ -7517,7 +7517,7 @@
           </a:p>
           <a:p>
             <a:r>
-              <a:rPr sz="962" b="0" i="0">
+              <a:rPr sz="846" b="0" i="0">
                 <a:solidFill>
                   <a:srgbClr val="EAF7F5"/>
                 </a:solidFill>
@@ -7528,7 +7528,7 @@
           </a:p>
           <a:p>
             <a:r>
-              <a:rPr sz="962" b="0" i="0">
+              <a:rPr sz="846" b="0" i="0">
                 <a:solidFill>
                   <a:srgbClr val="EAF7F5"/>
                 </a:solidFill>
@@ -7539,7 +7539,7 @@
           </a:p>
           <a:p>
             <a:r>
-              <a:rPr sz="962" b="0" i="0">
+              <a:rPr sz="846" b="0" i="0">
                 <a:solidFill>
                   <a:srgbClr val="EAF7F5"/>
                 </a:solidFill>
@@ -7550,7 +7550,7 @@
           </a:p>
           <a:p>
             <a:r>
-              <a:rPr sz="962" b="0" i="0">
+              <a:rPr sz="846" b="0" i="0">
                 <a:solidFill>
                   <a:srgbClr val="EAF7F5"/>
                 </a:solidFill>
@@ -7561,7 +7561,7 @@
           </a:p>
           <a:p>
             <a:r>
-              <a:rPr sz="962" b="0" i="0">
+              <a:rPr sz="846" b="0" i="0">
                 <a:solidFill>
                   <a:srgbClr val="EAF7F5"/>
                 </a:solidFill>
@@ -7572,7 +7572,7 @@
           </a:p>
           <a:p>
             <a:r>
-              <a:rPr sz="962" b="0" i="0">
+              <a:rPr sz="846" b="0" i="0">
                 <a:solidFill>
                   <a:srgbClr val="EAF7F5"/>
                 </a:solidFill>
@@ -10602,13 +10602,13 @@
           <a:noFill/>
         </p:spPr>
         <p:txBody>
-          <a:bodyPr wrap="square" lIns="0" rIns="0" tIns="0" bIns="0" anchor="t">
-            <a:spAutoFit/>
-          </a:bodyPr>
-          <a:lstStyle/>
-          <a:p>
-            <a:r>
-              <a:rPr sz="1085" b="0" i="0">
+          <a:bodyPr wrap="none" lIns="0" rIns="0" tIns="0" bIns="0" anchor="t">
+            <a:spAutoFit/>
+          </a:bodyPr>
+          <a:lstStyle/>
+          <a:p>
+            <a:r>
+              <a:rPr sz="954" b="0" i="0">
                 <a:solidFill>
                   <a:srgbClr val="EAF7F5"/>
                 </a:solidFill>
@@ -10619,7 +10619,7 @@
           </a:p>
           <a:p>
             <a:r>
-              <a:rPr sz="1085" b="0" i="0">
+              <a:rPr sz="954" b="0" i="0">
                 <a:solidFill>
                   <a:srgbClr val="EAF7F5"/>
                 </a:solidFill>
@@ -10630,7 +10630,7 @@
           </a:p>
           <a:p>
             <a:r>
-              <a:rPr sz="1085" b="0" i="0">
+              <a:rPr sz="954" b="0" i="0">
                 <a:solidFill>
                   <a:srgbClr val="EAF7F5"/>
                 </a:solidFill>
@@ -10641,7 +10641,7 @@
           </a:p>
           <a:p>
             <a:r>
-              <a:rPr sz="1085" b="0" i="0">
+              <a:rPr sz="954" b="0" i="0">
                 <a:solidFill>
                   <a:srgbClr val="EAF7F5"/>
                 </a:solidFill>
@@ -10652,7 +10652,7 @@
           </a:p>
           <a:p>
             <a:r>
-              <a:rPr sz="1085" b="0" i="0">
+              <a:rPr sz="954" b="0" i="0">
                 <a:solidFill>
                   <a:srgbClr val="EAF7F5"/>
                 </a:solidFill>
@@ -10663,7 +10663,7 @@
           </a:p>
           <a:p>
             <a:r>
-              <a:rPr sz="1085" b="0" i="0">
+              <a:rPr sz="954" b="0" i="0">
                 <a:solidFill>
                   <a:srgbClr val="EAF7F5"/>
                 </a:solidFill>
@@ -10674,7 +10674,7 @@
           </a:p>
           <a:p>
             <a:r>
-              <a:rPr sz="1085" b="0" i="0">
+              <a:rPr sz="954" b="0" i="0">
                 <a:solidFill>
                   <a:srgbClr val="EAF7F5"/>
                 </a:solidFill>
@@ -10685,7 +10685,7 @@
           </a:p>
           <a:p>
             <a:r>
-              <a:rPr sz="1085" b="0" i="0">
+              <a:rPr sz="954" b="0" i="0">
                 <a:solidFill>
                   <a:srgbClr val="EAF7F5"/>
                 </a:solidFill>
@@ -10696,7 +10696,7 @@
           </a:p>
           <a:p>
             <a:r>
-              <a:rPr sz="1085" b="0" i="0">
+              <a:rPr sz="954" b="0" i="0">
                 <a:solidFill>
                   <a:srgbClr val="EAF7F5"/>
                 </a:solidFill>
@@ -11019,13 +11019,13 @@
           <a:noFill/>
         </p:spPr>
         <p:txBody>
-          <a:bodyPr wrap="square" lIns="0" rIns="0" tIns="0" bIns="0" anchor="t">
-            <a:spAutoFit/>
-          </a:bodyPr>
-          <a:lstStyle/>
-          <a:p>
-            <a:r>
-              <a:rPr sz="1085" b="0" i="0">
+          <a:bodyPr wrap="none" lIns="0" rIns="0" tIns="0" bIns="0" anchor="t">
+            <a:spAutoFit/>
+          </a:bodyPr>
+          <a:lstStyle/>
+          <a:p>
+            <a:r>
+              <a:rPr sz="954" b="0" i="0">
                 <a:solidFill>
                   <a:srgbClr val="EAF7F5"/>
                 </a:solidFill>
@@ -11036,7 +11036,7 @@
           </a:p>
           <a:p>
             <a:r>
-              <a:rPr sz="1085" b="0" i="0">
+              <a:rPr sz="954" b="0" i="0">
                 <a:solidFill>
                   <a:srgbClr val="EAF7F5"/>
                 </a:solidFill>
@@ -11047,7 +11047,7 @@
           </a:p>
           <a:p>
             <a:r>
-              <a:rPr sz="1085" b="0" i="0">
+              <a:rPr sz="954" b="0" i="0">
                 <a:solidFill>
                   <a:srgbClr val="EAF7F5"/>
                 </a:solidFill>
@@ -11058,7 +11058,7 @@
           </a:p>
           <a:p>
             <a:r>
-              <a:rPr sz="1085" b="0" i="0">
+              <a:rPr sz="954" b="0" i="0">
                 <a:solidFill>
                   <a:srgbClr val="EAF7F5"/>
                 </a:solidFill>
@@ -11069,7 +11069,7 @@
           </a:p>
           <a:p>
             <a:r>
-              <a:rPr sz="1085" b="0" i="0">
+              <a:rPr sz="954" b="0" i="0">
                 <a:solidFill>
                   <a:srgbClr val="EAF7F5"/>
                 </a:solidFill>
@@ -11080,7 +11080,7 @@
           </a:p>
           <a:p>
             <a:r>
-              <a:rPr sz="1085" b="0" i="0">
+              <a:rPr sz="954" b="0" i="0">
                 <a:solidFill>
                   <a:srgbClr val="EAF7F5"/>
                 </a:solidFill>
@@ -11091,7 +11091,7 @@
           </a:p>
           <a:p>
             <a:r>
-              <a:rPr sz="1085" b="0" i="0">
+              <a:rPr sz="954" b="0" i="0">
                 <a:solidFill>
                   <a:srgbClr val="EAF7F5"/>
                 </a:solidFill>
@@ -11102,7 +11102,7 @@
           </a:p>
           <a:p>
             <a:r>
-              <a:rPr sz="1085" b="0" i="0">
+              <a:rPr sz="954" b="0" i="0">
                 <a:solidFill>
                   <a:srgbClr val="EAF7F5"/>
                 </a:solidFill>
@@ -11113,7 +11113,7 @@
           </a:p>
           <a:p>
             <a:r>
-              <a:rPr sz="1085" b="0" i="0">
+              <a:rPr sz="954" b="0" i="0">
                 <a:solidFill>
                   <a:srgbClr val="EAF7F5"/>
                 </a:solidFill>
@@ -11124,7 +11124,7 @@
           </a:p>
           <a:p>
             <a:r>
-              <a:rPr sz="1085" b="0" i="0">
+              <a:rPr sz="954" b="0" i="0">
                 <a:solidFill>
                   <a:srgbClr val="EAF7F5"/>
                 </a:solidFill>
